--- a/extra_utilities/dc_params_primer/dc_params_primer.pptx
+++ b/extra_utilities/dc_params_primer/dc_params_primer.pptx
@@ -3166,7 +3166,7 @@
         </p:nvSpPr>
         <p:spPr>
           <a:xfrm>
-            <a:off x="1395557" y="865205"/>
+            <a:off x="1596725" y="865205"/>
             <a:ext cx="1744309" cy="1744309"/>
           </a:xfrm>
           <a:prstGeom prst="ellipse">
@@ -3210,7 +3210,7 @@
         </p:nvSpPr>
         <p:spPr>
           <a:xfrm>
-            <a:off x="1854220" y="1323868"/>
+            <a:off x="2055388" y="1323868"/>
             <a:ext cx="826983" cy="826983"/>
           </a:xfrm>
           <a:prstGeom prst="ellipse">
@@ -3254,7 +3254,7 @@
         </p:nvSpPr>
         <p:spPr>
           <a:xfrm>
-            <a:off x="1395557" y="865205"/>
+            <a:off x="1596725" y="865205"/>
             <a:ext cx="1744309" cy="1744309"/>
           </a:xfrm>
           <a:prstGeom prst="ellipse">
@@ -3299,7 +3299,7 @@
         </p:nvSpPr>
         <p:spPr>
           <a:xfrm>
-            <a:off x="1854220" y="1323868"/>
+            <a:off x="2055388" y="1323868"/>
             <a:ext cx="826983" cy="826983"/>
           </a:xfrm>
           <a:prstGeom prst="ellipse">
@@ -3344,7 +3344,7 @@
         </p:nvSpPr>
         <p:spPr>
           <a:xfrm>
-            <a:off x="2077388" y="536193"/>
+            <a:off x="2278556" y="536193"/>
             <a:ext cx="380648" cy="1140180"/>
           </a:xfrm>
           <a:custGeom>
@@ -3645,7 +3645,7 @@
         </p:nvSpPr>
         <p:spPr>
           <a:xfrm>
-            <a:off x="1008126" y="477774"/>
+            <a:off x="1209294" y="477774"/>
             <a:ext cx="2519172" cy="2519172"/>
           </a:xfrm>
           <a:prstGeom prst="ellipse">
@@ -3689,7 +3689,7 @@
         </p:nvSpPr>
         <p:spPr>
           <a:xfrm>
-            <a:off x="1094994" y="564642"/>
+            <a:off x="1296162" y="564642"/>
             <a:ext cx="2345436" cy="2345436"/>
           </a:xfrm>
           <a:prstGeom prst="ellipse">
@@ -3733,7 +3733,7 @@
         </p:nvSpPr>
         <p:spPr>
           <a:xfrm>
-            <a:off x="1051560" y="521208"/>
+            <a:off x="1252728" y="521208"/>
             <a:ext cx="2432304" cy="2432304"/>
           </a:xfrm>
           <a:prstGeom prst="ellipse">
@@ -3778,18 +3778,18 @@
         </p:nvSpPr>
         <p:spPr>
           <a:xfrm>
-            <a:off x="2198218" y="1667866"/>
-            <a:ext cx="138989" cy="138989"/>
+            <a:off x="2329891" y="1598371"/>
+            <a:ext cx="277978" cy="277978"/>
           </a:xfrm>
           <a:prstGeom prst="ellipse">
             <a:avLst/>
           </a:prstGeom>
           <a:solidFill>
-            <a:srgbClr val="DCE6F5"/>
+            <a:srgbClr val="EDEDED"/>
           </a:solidFill>
           <a:ln w="15875">
             <a:solidFill>
-              <a:srgbClr val="1F5FD0"/>
+              <a:srgbClr val="7A7A7A"/>
             </a:solidFill>
           </a:ln>
           <a:effectLst/>
@@ -3816,15 +3816,60 @@
           </a:p>
         </p:txBody>
       </p:sp>
+      <p:sp>
+        <p:nvSpPr>
+          <p:cNvPr id="13" name="Oval 12"/>
+          <p:cNvSpPr/>
+          <p:nvPr/>
+        </p:nvSpPr>
+        <p:spPr>
+          <a:xfrm>
+            <a:off x="2399386" y="1667866"/>
+            <a:ext cx="138989" cy="138989"/>
+          </a:xfrm>
+          <a:prstGeom prst="ellipse">
+            <a:avLst/>
+          </a:prstGeom>
+          <a:noFill/>
+          <a:ln w="12700">
+            <a:solidFill>
+              <a:srgbClr val="1F5FD0"/>
+            </a:solidFill>
+            <a:prstDash val="sysDash"/>
+          </a:ln>
+          <a:effectLst/>
+        </p:spPr>
+        <p:style>
+          <a:lnRef idx="1">
+            <a:schemeClr val="accent1"/>
+          </a:lnRef>
+          <a:fillRef idx="3">
+            <a:schemeClr val="accent1"/>
+          </a:fillRef>
+          <a:effectRef idx="2">
+            <a:schemeClr val="accent1"/>
+          </a:effectRef>
+          <a:fontRef idx="minor">
+            <a:schemeClr val="lt1"/>
+          </a:fontRef>
+        </p:style>
+        <p:txBody>
+          <a:bodyPr rtlCol="0" anchor="ctr"/>
+          <a:lstStyle/>
+          <a:p>
+            <a:pPr algn="ctr"/>
+          </a:p>
+        </p:txBody>
+      </p:sp>
       <p:cxnSp>
         <p:nvCxnSpPr>
-          <p:cNvPr id="13" name="Connector 12"/>
+          <p:cNvPr id="14" name="Connector 13"/>
           <p:cNvCxnSpPr/>
           <p:nvPr/>
         </p:nvCxnSpPr>
         <p:spPr>
           <a:xfrm>
-            <a:off x="1051560" y="1737360"/>
+            <a:off x="1252728" y="1737360"/>
             <a:ext cx="2432304" cy="0"/>
           </a:xfrm>
           <a:prstGeom prst="line">
@@ -3855,13 +3900,13 @@
       </p:cxnSp>
       <p:cxnSp>
         <p:nvCxnSpPr>
-          <p:cNvPr id="14" name="Connector 13"/>
+          <p:cNvPr id="15" name="Connector 14"/>
           <p:cNvCxnSpPr/>
           <p:nvPr/>
         </p:nvCxnSpPr>
         <p:spPr>
           <a:xfrm>
-            <a:off x="1051560" y="1673352"/>
+            <a:off x="1252728" y="1673352"/>
             <a:ext cx="0" cy="128016"/>
           </a:xfrm>
           <a:prstGeom prst="line">
@@ -3890,13 +3935,13 @@
       </p:cxnSp>
       <p:cxnSp>
         <p:nvCxnSpPr>
-          <p:cNvPr id="15" name="Connector 14"/>
+          <p:cNvPr id="16" name="Connector 15"/>
           <p:cNvCxnSpPr/>
           <p:nvPr/>
         </p:nvCxnSpPr>
         <p:spPr>
           <a:xfrm>
-            <a:off x="3483864" y="1673352"/>
+            <a:off x="3685032" y="1673352"/>
             <a:ext cx="0" cy="128016"/>
           </a:xfrm>
           <a:prstGeom prst="line">
@@ -3925,13 +3970,13 @@
       </p:cxnSp>
       <p:cxnSp>
         <p:nvCxnSpPr>
-          <p:cNvPr id="16" name="Connector 15"/>
+          <p:cNvPr id="17" name="Connector 16"/>
           <p:cNvCxnSpPr/>
           <p:nvPr/>
         </p:nvCxnSpPr>
         <p:spPr>
           <a:xfrm flipV="1">
-            <a:off x="2267712" y="865205"/>
+            <a:off x="2468880" y="865205"/>
             <a:ext cx="0" cy="458663"/>
           </a:xfrm>
           <a:prstGeom prst="line">
@@ -3962,13 +4007,13 @@
       </p:cxnSp>
       <p:cxnSp>
         <p:nvCxnSpPr>
-          <p:cNvPr id="17" name="Connector 16"/>
+          <p:cNvPr id="18" name="Connector 17"/>
           <p:cNvCxnSpPr/>
           <p:nvPr/>
         </p:nvCxnSpPr>
         <p:spPr>
           <a:xfrm>
-            <a:off x="2076602" y="532181"/>
+            <a:off x="2277770" y="532181"/>
             <a:ext cx="382220" cy="0"/>
           </a:xfrm>
           <a:prstGeom prst="line">
@@ -3997,14 +4042,14 @@
       </p:cxnSp>
       <p:cxnSp>
         <p:nvCxnSpPr>
-          <p:cNvPr id="18" name="Connector 17"/>
+          <p:cNvPr id="19" name="Connector 18"/>
           <p:cNvCxnSpPr/>
           <p:nvPr/>
         </p:nvCxnSpPr>
         <p:spPr>
           <a:xfrm flipV="1">
-            <a:off x="2449678" y="384048"/>
-            <a:ext cx="769010" cy="147218"/>
+            <a:off x="2650846" y="384048"/>
+            <a:ext cx="567842" cy="147218"/>
           </a:xfrm>
           <a:prstGeom prst="line">
             <a:avLst/>
@@ -4032,7 +4077,7 @@
       </p:cxnSp>
       <p:sp>
         <p:nvSpPr>
-          <p:cNvPr id="19" name="TextBox 18"/>
+          <p:cNvPr id="20" name="TextBox 19"/>
           <p:cNvSpPr txBox="1"/>
           <p:nvPr/>
         </p:nvSpPr>
@@ -4067,7 +4112,7 @@
       </p:sp>
       <p:sp>
         <p:nvSpPr>
-          <p:cNvPr id="20" name="TextBox 19"/>
+          <p:cNvPr id="21" name="TextBox 20"/>
           <p:cNvSpPr txBox="1"/>
           <p:nvPr/>
         </p:nvSpPr>
@@ -4102,14 +4147,14 @@
       </p:sp>
       <p:cxnSp>
         <p:nvCxnSpPr>
-          <p:cNvPr id="21" name="Connector 20"/>
+          <p:cNvPr id="22" name="Connector 21"/>
           <p:cNvCxnSpPr/>
           <p:nvPr/>
         </p:nvCxnSpPr>
         <p:spPr>
           <a:xfrm>
             <a:off x="1005840" y="1094537"/>
-            <a:ext cx="1124712" cy="0"/>
+            <a:ext cx="1325880" cy="0"/>
           </a:xfrm>
           <a:prstGeom prst="line">
             <a:avLst/>
@@ -4137,7 +4182,7 @@
       </p:cxnSp>
       <p:sp>
         <p:nvSpPr>
-          <p:cNvPr id="22" name="TextBox 21"/>
+          <p:cNvPr id="23" name="TextBox 22"/>
           <p:cNvSpPr txBox="1"/>
           <p:nvPr/>
         </p:nvSpPr>
@@ -4172,7 +4217,7 @@
       </p:sp>
       <p:sp>
         <p:nvSpPr>
-          <p:cNvPr id="23" name="TextBox 22"/>
+          <p:cNvPr id="24" name="TextBox 23"/>
           <p:cNvSpPr txBox="1"/>
           <p:nvPr/>
         </p:nvSpPr>
@@ -4207,21 +4252,21 @@
       </p:sp>
       <p:cxnSp>
         <p:nvCxnSpPr>
-          <p:cNvPr id="24" name="Connector 23"/>
+          <p:cNvPr id="25" name="Connector 24"/>
           <p:cNvCxnSpPr/>
           <p:nvPr/>
         </p:nvCxnSpPr>
         <p:spPr>
           <a:xfrm flipV="1">
-            <a:off x="1152144" y="1810512"/>
-            <a:ext cx="1024128" cy="384048"/>
+            <a:off x="932688" y="1828800"/>
+            <a:ext cx="1417320" cy="566928"/>
           </a:xfrm>
           <a:prstGeom prst="line">
             <a:avLst/>
           </a:prstGeom>
           <a:ln w="9525">
             <a:solidFill>
-              <a:srgbClr val="1F5FD0"/>
+              <a:srgbClr val="C8C8C8"/>
             </a:solidFill>
           </a:ln>
         </p:spPr>
@@ -4242,14 +4287,317 @@
       </p:cxnSp>
       <p:sp>
         <p:nvSpPr>
-          <p:cNvPr id="25" name="TextBox 24"/>
+          <p:cNvPr id="26" name="TextBox 25"/>
           <p:cNvSpPr txBox="1"/>
           <p:nvPr/>
         </p:nvSpPr>
         <p:spPr>
           <a:xfrm>
-            <a:off x="182880" y="2121408"/>
-            <a:ext cx="764476" cy="190881"/>
+            <a:off x="182880" y="2029968"/>
+            <a:ext cx="885920" cy="190881"/>
+          </a:xfrm>
+          <a:prstGeom prst="rect">
+            <a:avLst/>
+          </a:prstGeom>
+          <a:noFill/>
+        </p:spPr>
+        <p:txBody>
+          <a:bodyPr wrap="none" anchor="t" lIns="0" rIns="0" tIns="0" bIns="0">
+            <a:spAutoFit/>
+          </a:bodyPr>
+          <a:lstStyle/>
+          <a:p>
+            <a:pPr algn="l"/>
+            <a:r>
+              <a:rPr sz="900" b="0">
+                <a:solidFill>
+                  <a:srgbClr val="7A7A7A"/>
+                </a:solidFill>
+                <a:latin typeface="Arial"/>
+              </a:rPr>
+              <a:t>centre, enlarged</a:t>
+            </a:r>
+          </a:p>
+        </p:txBody>
+      </p:sp>
+      <p:sp>
+        <p:nvSpPr>
+          <p:cNvPr id="27" name="Oval 26"/>
+          <p:cNvSpPr/>
+          <p:nvPr/>
+        </p:nvSpPr>
+        <p:spPr>
+          <a:xfrm>
+            <a:off x="347472" y="2203704"/>
+            <a:ext cx="621792" cy="621792"/>
+          </a:xfrm>
+          <a:prstGeom prst="ellipse">
+            <a:avLst/>
+          </a:prstGeom>
+          <a:solidFill>
+            <a:srgbClr val="EDEDED"/>
+          </a:solidFill>
+          <a:ln w="15875">
+            <a:solidFill>
+              <a:srgbClr val="7A7A7A"/>
+            </a:solidFill>
+          </a:ln>
+          <a:effectLst/>
+        </p:spPr>
+        <p:style>
+          <a:lnRef idx="1">
+            <a:schemeClr val="accent1"/>
+          </a:lnRef>
+          <a:fillRef idx="3">
+            <a:schemeClr val="accent1"/>
+          </a:fillRef>
+          <a:effectRef idx="2">
+            <a:schemeClr val="accent1"/>
+          </a:effectRef>
+          <a:fontRef idx="minor">
+            <a:schemeClr val="lt1"/>
+          </a:fontRef>
+        </p:style>
+        <p:txBody>
+          <a:bodyPr rtlCol="0" anchor="ctr"/>
+          <a:lstStyle/>
+          <a:p>
+            <a:pPr algn="ctr"/>
+          </a:p>
+        </p:txBody>
+      </p:sp>
+      <p:sp>
+        <p:nvSpPr>
+          <p:cNvPr id="28" name="Oval 27"/>
+          <p:cNvSpPr/>
+          <p:nvPr/>
+        </p:nvSpPr>
+        <p:spPr>
+          <a:xfrm>
+            <a:off x="502920" y="2359152"/>
+            <a:ext cx="310896" cy="310896"/>
+          </a:xfrm>
+          <a:prstGeom prst="ellipse">
+            <a:avLst/>
+          </a:prstGeom>
+          <a:noFill/>
+          <a:ln w="15875">
+            <a:solidFill>
+              <a:srgbClr val="1F5FD0"/>
+            </a:solidFill>
+            <a:prstDash val="sysDash"/>
+          </a:ln>
+          <a:effectLst/>
+        </p:spPr>
+        <p:style>
+          <a:lnRef idx="1">
+            <a:schemeClr val="accent1"/>
+          </a:lnRef>
+          <a:fillRef idx="3">
+            <a:schemeClr val="accent1"/>
+          </a:fillRef>
+          <a:effectRef idx="2">
+            <a:schemeClr val="accent1"/>
+          </a:effectRef>
+          <a:fontRef idx="minor">
+            <a:schemeClr val="lt1"/>
+          </a:fontRef>
+        </p:style>
+        <p:txBody>
+          <a:bodyPr rtlCol="0" anchor="ctr"/>
+          <a:lstStyle/>
+          <a:p>
+            <a:pPr algn="ctr"/>
+          </a:p>
+        </p:txBody>
+      </p:sp>
+      <p:cxnSp>
+        <p:nvCxnSpPr>
+          <p:cNvPr id="29" name="Connector 28"/>
+          <p:cNvCxnSpPr/>
+          <p:nvPr/>
+        </p:nvCxnSpPr>
+        <p:spPr>
+          <a:xfrm flipH="1">
+            <a:off x="502920" y="2514600"/>
+            <a:ext cx="155448" cy="0"/>
+          </a:xfrm>
+          <a:prstGeom prst="line">
+            <a:avLst/>
+          </a:prstGeom>
+          <a:ln w="12700">
+            <a:solidFill>
+              <a:srgbClr val="1F5FD0"/>
+            </a:solidFill>
+            <a:tailEnd type="triangle" w="lg" len="lg"/>
+          </a:ln>
+        </p:spPr>
+        <p:style>
+          <a:lnRef idx="2">
+            <a:schemeClr val="accent1"/>
+          </a:lnRef>
+          <a:fillRef idx="0">
+            <a:schemeClr val="accent1"/>
+          </a:fillRef>
+          <a:effectRef idx="1">
+            <a:schemeClr val="accent1"/>
+          </a:effectRef>
+          <a:fontRef idx="minor">
+            <a:schemeClr val="tx1"/>
+          </a:fontRef>
+        </p:style>
+      </p:cxnSp>
+      <p:sp>
+        <p:nvSpPr>
+          <p:cNvPr id="30" name="TextBox 29"/>
+          <p:cNvSpPr txBox="1"/>
+          <p:nvPr/>
+        </p:nvSpPr>
+        <p:spPr>
+          <a:xfrm>
+            <a:off x="356330" y="2377440"/>
+            <a:ext cx="119158" cy="190881"/>
+          </a:xfrm>
+          <a:prstGeom prst="rect">
+            <a:avLst/>
+          </a:prstGeom>
+          <a:noFill/>
+        </p:spPr>
+        <p:txBody>
+          <a:bodyPr wrap="none" anchor="t" lIns="0" rIns="0" tIns="0" bIns="0">
+            <a:spAutoFit/>
+          </a:bodyPr>
+          <a:lstStyle/>
+          <a:p>
+            <a:pPr algn="r"/>
+            <a:r>
+              <a:rPr sz="900" b="1">
+                <a:solidFill>
+                  <a:srgbClr val="1F5FD0"/>
+                </a:solidFill>
+                <a:latin typeface="Arial"/>
+              </a:rPr>
+              <a:t>4</a:t>
+            </a:r>
+          </a:p>
+        </p:txBody>
+      </p:sp>
+      <p:cxnSp>
+        <p:nvCxnSpPr>
+          <p:cNvPr id="31" name="Connector 30"/>
+          <p:cNvCxnSpPr/>
+          <p:nvPr/>
+        </p:nvCxnSpPr>
+        <p:spPr>
+          <a:xfrm>
+            <a:off x="658368" y="2514600"/>
+            <a:ext cx="219837" cy="219837"/>
+          </a:xfrm>
+          <a:prstGeom prst="line">
+            <a:avLst/>
+          </a:prstGeom>
+          <a:ln w="12700">
+            <a:solidFill>
+              <a:srgbClr val="7A7A7A"/>
+            </a:solidFill>
+            <a:tailEnd type="triangle" w="lg" len="lg"/>
+          </a:ln>
+        </p:spPr>
+        <p:style>
+          <a:lnRef idx="2">
+            <a:schemeClr val="accent1"/>
+          </a:lnRef>
+          <a:fillRef idx="0">
+            <a:schemeClr val="accent1"/>
+          </a:fillRef>
+          <a:effectRef idx="1">
+            <a:schemeClr val="accent1"/>
+          </a:effectRef>
+          <a:fontRef idx="minor">
+            <a:schemeClr val="tx1"/>
+          </a:fontRef>
+        </p:style>
+      </p:cxnSp>
+      <p:sp>
+        <p:nvSpPr>
+          <p:cNvPr id="32" name="TextBox 31"/>
+          <p:cNvSpPr txBox="1"/>
+          <p:nvPr/>
+        </p:nvSpPr>
+        <p:spPr>
+          <a:xfrm>
+            <a:off x="896493" y="2661285"/>
+            <a:ext cx="119158" cy="190881"/>
+          </a:xfrm>
+          <a:prstGeom prst="rect">
+            <a:avLst/>
+          </a:prstGeom>
+          <a:noFill/>
+        </p:spPr>
+        <p:txBody>
+          <a:bodyPr wrap="none" anchor="t" lIns="0" rIns="0" tIns="0" bIns="0">
+            <a:spAutoFit/>
+          </a:bodyPr>
+          <a:lstStyle/>
+          <a:p>
+            <a:pPr algn="l"/>
+            <a:r>
+              <a:rPr sz="900" b="1">
+                <a:solidFill>
+                  <a:srgbClr val="7A7A7A"/>
+                </a:solidFill>
+                <a:latin typeface="Arial"/>
+              </a:rPr>
+              <a:t>8</a:t>
+            </a:r>
+          </a:p>
+        </p:txBody>
+      </p:sp>
+      <p:sp>
+        <p:nvSpPr>
+          <p:cNvPr id="33" name="TextBox 32"/>
+          <p:cNvSpPr txBox="1"/>
+          <p:nvPr/>
+        </p:nvSpPr>
+        <p:spPr>
+          <a:xfrm>
+            <a:off x="182880" y="2871216"/>
+            <a:ext cx="797814" cy="190881"/>
+          </a:xfrm>
+          <a:prstGeom prst="rect">
+            <a:avLst/>
+          </a:prstGeom>
+          <a:noFill/>
+        </p:spPr>
+        <p:txBody>
+          <a:bodyPr wrap="none" anchor="t" lIns="0" rIns="0" tIns="0" bIns="0">
+            <a:spAutoFit/>
+          </a:bodyPr>
+          <a:lstStyle/>
+          <a:p>
+            <a:pPr algn="l"/>
+            <a:r>
+              <a:rPr sz="900" b="1">
+                <a:solidFill>
+                  <a:srgbClr val="7A7A7A"/>
+                </a:solidFill>
+                <a:latin typeface="Arial"/>
+              </a:rPr>
+              <a:t>hub  r = 8 mm</a:t>
+            </a:r>
+          </a:p>
+        </p:txBody>
+      </p:sp>
+      <p:sp>
+        <p:nvSpPr>
+          <p:cNvPr id="34" name="TextBox 33"/>
+          <p:cNvSpPr txBox="1"/>
+          <p:nvPr/>
+        </p:nvSpPr>
+        <p:spPr>
+          <a:xfrm>
+            <a:off x="182880" y="2999232"/>
+            <a:ext cx="1300258" cy="190881"/>
           </a:xfrm>
           <a:prstGeom prst="rect">
             <a:avLst/>
@@ -4270,21 +4618,21 @@
                 </a:solidFill>
                 <a:latin typeface="Arial"/>
               </a:rPr>
-              <a:t>inner section</a:t>
+              <a:t>inner section  r = 4 mm</a:t>
             </a:r>
           </a:p>
         </p:txBody>
       </p:sp>
       <p:sp>
         <p:nvSpPr>
-          <p:cNvPr id="26" name="TextBox 25"/>
+          <p:cNvPr id="35" name="TextBox 34"/>
           <p:cNvSpPr txBox="1"/>
           <p:nvPr/>
         </p:nvSpPr>
         <p:spPr>
           <a:xfrm>
-            <a:off x="182880" y="2249424"/>
-            <a:ext cx="933545" cy="190881"/>
+            <a:off x="182880" y="3127248"/>
+            <a:ext cx="916876" cy="190881"/>
           </a:xfrm>
           <a:prstGeom prst="rect">
             <a:avLst/>
@@ -4301,24 +4649,24 @@
             <a:r>
               <a:rPr sz="900" b="0">
                 <a:solidFill>
-                  <a:srgbClr val="1F5FD0"/>
+                  <a:srgbClr val="7A7A7A"/>
                 </a:solidFill>
                 <a:latin typeface="Arial"/>
               </a:rPr>
-              <a:t>at hub (r = 4 mm)</a:t>
+              <a:t>— inside the hub</a:t>
             </a:r>
           </a:p>
         </p:txBody>
       </p:sp>
       <p:sp>
         <p:nvSpPr>
-          <p:cNvPr id="27" name="TextBox 26"/>
+          <p:cNvPr id="36" name="TextBox 35"/>
           <p:cNvSpPr txBox="1"/>
           <p:nvPr/>
         </p:nvSpPr>
         <p:spPr>
           <a:xfrm>
-            <a:off x="1517571" y="3035808"/>
+            <a:off x="1718739" y="3035808"/>
             <a:ext cx="1500283" cy="216599"/>
           </a:xfrm>
           <a:prstGeom prst="rect">
@@ -4347,13 +4695,13 @@
       </p:sp>
       <p:sp>
         <p:nvSpPr>
-          <p:cNvPr id="28" name="TextBox 27"/>
+          <p:cNvPr id="37" name="TextBox 36"/>
           <p:cNvSpPr txBox="1"/>
           <p:nvPr/>
         </p:nvSpPr>
         <p:spPr>
           <a:xfrm>
-            <a:off x="1083067" y="3218688"/>
+            <a:off x="1284235" y="3218688"/>
             <a:ext cx="2369290" cy="190881"/>
           </a:xfrm>
           <a:prstGeom prst="rect">
@@ -4382,7 +4730,7 @@
       </p:sp>
       <p:cxnSp>
         <p:nvCxnSpPr>
-          <p:cNvPr id="29" name="Connector 28"/>
+          <p:cNvPr id="38" name="Connector 37"/>
           <p:cNvCxnSpPr/>
           <p:nvPr/>
         </p:nvCxnSpPr>
@@ -4417,7 +4765,7 @@
       </p:cxnSp>
       <p:sp>
         <p:nvSpPr>
-          <p:cNvPr id="30" name="TextBox 29"/>
+          <p:cNvPr id="39" name="TextBox 38"/>
           <p:cNvSpPr txBox="1"/>
           <p:nvPr/>
         </p:nvSpPr>
@@ -4452,7 +4800,7 @@
       </p:sp>
       <p:sp>
         <p:nvSpPr>
-          <p:cNvPr id="31" name="TextBox 30"/>
+          <p:cNvPr id="40" name="TextBox 39"/>
           <p:cNvSpPr txBox="1"/>
           <p:nvPr/>
         </p:nvSpPr>
@@ -4487,7 +4835,7 @@
       </p:sp>
       <p:sp>
         <p:nvSpPr>
-          <p:cNvPr id="32" name="TextBox 31"/>
+          <p:cNvPr id="41" name="TextBox 40"/>
           <p:cNvSpPr txBox="1"/>
           <p:nvPr/>
         </p:nvSpPr>
@@ -4522,7 +4870,7 @@
       </p:sp>
       <p:sp>
         <p:nvSpPr>
-          <p:cNvPr id="33" name="TextBox 32"/>
+          <p:cNvPr id="42" name="TextBox 41"/>
           <p:cNvSpPr txBox="1"/>
           <p:nvPr/>
         </p:nvSpPr>
@@ -4557,7 +4905,7 @@
       </p:sp>
       <p:sp>
         <p:nvSpPr>
-          <p:cNvPr id="34" name="TextBox 33"/>
+          <p:cNvPr id="43" name="TextBox 42"/>
           <p:cNvSpPr txBox="1"/>
           <p:nvPr/>
         </p:nvSpPr>
@@ -4592,7 +4940,7 @@
       </p:sp>
       <p:sp>
         <p:nvSpPr>
-          <p:cNvPr id="35" name="TextBox 34"/>
+          <p:cNvPr id="44" name="TextBox 43"/>
           <p:cNvSpPr txBox="1"/>
           <p:nvPr/>
         </p:nvSpPr>
@@ -4627,7 +4975,7 @@
       </p:sp>
       <p:sp>
         <p:nvSpPr>
-          <p:cNvPr id="36" name="TextBox 35"/>
+          <p:cNvPr id="45" name="TextBox 44"/>
           <p:cNvSpPr txBox="1"/>
           <p:nvPr/>
         </p:nvSpPr>
@@ -4662,7 +5010,7 @@
       </p:sp>
       <p:sp>
         <p:nvSpPr>
-          <p:cNvPr id="37" name="TextBox 36"/>
+          <p:cNvPr id="46" name="TextBox 45"/>
           <p:cNvSpPr txBox="1"/>
           <p:nvPr/>
         </p:nvSpPr>
@@ -4697,7 +5045,7 @@
       </p:sp>
       <p:sp>
         <p:nvSpPr>
-          <p:cNvPr id="38" name="Freeform 37"/>
+          <p:cNvPr id="47" name="Freeform 46"/>
           <p:cNvSpPr/>
           <p:nvPr/>
         </p:nvSpPr>
@@ -5115,7 +5463,7 @@
       </p:sp>
       <p:cxnSp>
         <p:nvCxnSpPr>
-          <p:cNvPr id="39" name="Connector 38"/>
+          <p:cNvPr id="48" name="Connector 47"/>
           <p:cNvCxnSpPr/>
           <p:nvPr/>
         </p:nvCxnSpPr>
@@ -5151,7 +5499,7 @@
       </p:cxnSp>
       <p:sp>
         <p:nvSpPr>
-          <p:cNvPr id="40" name="Freeform 39"/>
+          <p:cNvPr id="49" name="Freeform 48"/>
           <p:cNvSpPr/>
           <p:nvPr/>
         </p:nvSpPr>
@@ -5267,7 +5615,7 @@
       </p:sp>
       <p:sp>
         <p:nvSpPr>
-          <p:cNvPr id="41" name="Freeform 40"/>
+          <p:cNvPr id="50" name="Freeform 49"/>
           <p:cNvSpPr/>
           <p:nvPr/>
         </p:nvSpPr>
@@ -5685,7 +6033,7 @@
       </p:sp>
       <p:cxnSp>
         <p:nvCxnSpPr>
-          <p:cNvPr id="42" name="Connector 41"/>
+          <p:cNvPr id="51" name="Connector 50"/>
           <p:cNvCxnSpPr/>
           <p:nvPr/>
         </p:nvCxnSpPr>
@@ -5721,7 +6069,7 @@
       </p:cxnSp>
       <p:sp>
         <p:nvSpPr>
-          <p:cNvPr id="43" name="Freeform 42"/>
+          <p:cNvPr id="52" name="Freeform 51"/>
           <p:cNvSpPr/>
           <p:nvPr/>
         </p:nvSpPr>
@@ -5837,7 +6185,7 @@
       </p:sp>
       <p:sp>
         <p:nvSpPr>
-          <p:cNvPr id="44" name="Freeform 43"/>
+          <p:cNvPr id="53" name="Freeform 52"/>
           <p:cNvSpPr/>
           <p:nvPr/>
         </p:nvSpPr>
@@ -6255,7 +6603,7 @@
       </p:sp>
       <p:cxnSp>
         <p:nvCxnSpPr>
-          <p:cNvPr id="45" name="Connector 44"/>
+          <p:cNvPr id="54" name="Connector 53"/>
           <p:cNvCxnSpPr/>
           <p:nvPr/>
         </p:nvCxnSpPr>
@@ -6291,7 +6639,7 @@
       </p:cxnSp>
       <p:sp>
         <p:nvSpPr>
-          <p:cNvPr id="46" name="Freeform 45"/>
+          <p:cNvPr id="55" name="Freeform 54"/>
           <p:cNvSpPr/>
           <p:nvPr/>
         </p:nvSpPr>
@@ -6407,7 +6755,7 @@
       </p:sp>
       <p:sp>
         <p:nvSpPr>
-          <p:cNvPr id="47" name="Freeform 46"/>
+          <p:cNvPr id="56" name="Freeform 55"/>
           <p:cNvSpPr/>
           <p:nvPr/>
         </p:nvSpPr>
@@ -6825,7 +7173,7 @@
       </p:sp>
       <p:cxnSp>
         <p:nvCxnSpPr>
-          <p:cNvPr id="48" name="Connector 47"/>
+          <p:cNvPr id="57" name="Connector 56"/>
           <p:cNvCxnSpPr/>
           <p:nvPr/>
         </p:nvCxnSpPr>
@@ -6861,7 +7209,7 @@
       </p:cxnSp>
       <p:sp>
         <p:nvSpPr>
-          <p:cNvPr id="49" name="Freeform 48"/>
+          <p:cNvPr id="58" name="Freeform 57"/>
           <p:cNvSpPr/>
           <p:nvPr/>
         </p:nvSpPr>
@@ -6977,7 +7325,7 @@
       </p:sp>
       <p:sp>
         <p:nvSpPr>
-          <p:cNvPr id="50" name="Freeform 49"/>
+          <p:cNvPr id="59" name="Freeform 58"/>
           <p:cNvSpPr/>
           <p:nvPr/>
         </p:nvSpPr>
@@ -7042,7 +7390,7 @@
       </p:sp>
       <p:cxnSp>
         <p:nvCxnSpPr>
-          <p:cNvPr id="51" name="Connector 50"/>
+          <p:cNvPr id="60" name="Connector 59"/>
           <p:cNvCxnSpPr/>
           <p:nvPr/>
         </p:nvCxnSpPr>
@@ -7078,7 +7426,7 @@
       </p:cxnSp>
       <p:sp>
         <p:nvSpPr>
-          <p:cNvPr id="52" name="Freeform 51"/>
+          <p:cNvPr id="61" name="Freeform 60"/>
           <p:cNvSpPr/>
           <p:nvPr/>
         </p:nvSpPr>
@@ -7148,7 +7496,7 @@
       </p:sp>
       <p:sp>
         <p:nvSpPr>
-          <p:cNvPr id="53" name="Freeform 52"/>
+          <p:cNvPr id="62" name="Freeform 61"/>
           <p:cNvSpPr/>
           <p:nvPr/>
         </p:nvSpPr>
@@ -7566,7 +7914,7 @@
       </p:sp>
       <p:cxnSp>
         <p:nvCxnSpPr>
-          <p:cNvPr id="54" name="Connector 53"/>
+          <p:cNvPr id="63" name="Connector 62"/>
           <p:cNvCxnSpPr/>
           <p:nvPr/>
         </p:nvCxnSpPr>
@@ -7602,7 +7950,7 @@
       </p:cxnSp>
       <p:sp>
         <p:nvSpPr>
-          <p:cNvPr id="55" name="Freeform 54"/>
+          <p:cNvPr id="64" name="Freeform 63"/>
           <p:cNvSpPr/>
           <p:nvPr/>
         </p:nvSpPr>
@@ -7718,7 +8066,7 @@
       </p:sp>
       <p:cxnSp>
         <p:nvCxnSpPr>
-          <p:cNvPr id="56" name="Connector 55"/>
+          <p:cNvPr id="65" name="Connector 64"/>
           <p:cNvCxnSpPr/>
           <p:nvPr/>
         </p:nvCxnSpPr>
@@ -7753,7 +8101,7 @@
       </p:cxnSp>
       <p:sp>
         <p:nvSpPr>
-          <p:cNvPr id="57" name="TextBox 56"/>
+          <p:cNvPr id="66" name="TextBox 65"/>
           <p:cNvSpPr txBox="1"/>
           <p:nvPr/>
         </p:nvSpPr>
@@ -7788,7 +8136,7 @@
       </p:sp>
       <p:sp>
         <p:nvSpPr>
-          <p:cNvPr id="58" name="TextBox 57"/>
+          <p:cNvPr id="67" name="TextBox 66"/>
           <p:cNvSpPr txBox="1"/>
           <p:nvPr/>
         </p:nvSpPr>
@@ -7823,7 +8171,7 @@
       </p:sp>
       <p:sp>
         <p:nvSpPr>
-          <p:cNvPr id="59" name="TextBox 58"/>
+          <p:cNvPr id="68" name="TextBox 67"/>
           <p:cNvSpPr txBox="1"/>
           <p:nvPr/>
         </p:nvSpPr>
@@ -7858,7 +8206,7 @@
       </p:sp>
       <p:cxnSp>
         <p:nvCxnSpPr>
-          <p:cNvPr id="60" name="Connector 59"/>
+          <p:cNvPr id="69" name="Connector 68"/>
           <p:cNvCxnSpPr/>
           <p:nvPr/>
         </p:nvCxnSpPr>
@@ -7893,7 +8241,7 @@
       </p:cxnSp>
       <p:sp>
         <p:nvSpPr>
-          <p:cNvPr id="61" name="TextBox 60"/>
+          <p:cNvPr id="70" name="TextBox 69"/>
           <p:cNvSpPr txBox="1"/>
           <p:nvPr/>
         </p:nvSpPr>
@@ -7928,7 +8276,7 @@
       </p:sp>
       <p:sp>
         <p:nvSpPr>
-          <p:cNvPr id="62" name="TextBox 61"/>
+          <p:cNvPr id="71" name="TextBox 70"/>
           <p:cNvSpPr txBox="1"/>
           <p:nvPr/>
         </p:nvSpPr>
@@ -7963,7 +8311,7 @@
       </p:sp>
       <p:sp>
         <p:nvSpPr>
-          <p:cNvPr id="63" name="TextBox 62"/>
+          <p:cNvPr id="72" name="TextBox 71"/>
           <p:cNvSpPr txBox="1"/>
           <p:nvPr/>
         </p:nvSpPr>
@@ -7998,7 +8346,7 @@
       </p:sp>
       <p:sp>
         <p:nvSpPr>
-          <p:cNvPr id="64" name="Freeform 63"/>
+          <p:cNvPr id="73" name="Freeform 72"/>
           <p:cNvSpPr/>
           <p:nvPr/>
         </p:nvSpPr>
@@ -8416,7 +8764,7 @@
       </p:sp>
       <p:cxnSp>
         <p:nvCxnSpPr>
-          <p:cNvPr id="65" name="Connector 64"/>
+          <p:cNvPr id="74" name="Connector 73"/>
           <p:cNvCxnSpPr/>
           <p:nvPr/>
         </p:nvCxnSpPr>
@@ -8452,7 +8800,7 @@
       </p:cxnSp>
       <p:sp>
         <p:nvSpPr>
-          <p:cNvPr id="66" name="Freeform 65"/>
+          <p:cNvPr id="75" name="Freeform 74"/>
           <p:cNvSpPr/>
           <p:nvPr/>
         </p:nvSpPr>
@@ -8568,7 +8916,7 @@
       </p:sp>
       <p:sp>
         <p:nvSpPr>
-          <p:cNvPr id="67" name="Freeform 66"/>
+          <p:cNvPr id="76" name="Freeform 75"/>
           <p:cNvSpPr/>
           <p:nvPr/>
         </p:nvSpPr>
@@ -8986,7 +9334,7 @@
       </p:sp>
       <p:cxnSp>
         <p:nvCxnSpPr>
-          <p:cNvPr id="68" name="Connector 67"/>
+          <p:cNvPr id="77" name="Connector 76"/>
           <p:cNvCxnSpPr/>
           <p:nvPr/>
         </p:nvCxnSpPr>
@@ -9022,7 +9370,7 @@
       </p:cxnSp>
       <p:sp>
         <p:nvSpPr>
-          <p:cNvPr id="69" name="Freeform 68"/>
+          <p:cNvPr id="78" name="Freeform 77"/>
           <p:cNvSpPr/>
           <p:nvPr/>
         </p:nvSpPr>
@@ -9138,7 +9486,7 @@
       </p:sp>
       <p:sp>
         <p:nvSpPr>
-          <p:cNvPr id="70" name="Freeform 69"/>
+          <p:cNvPr id="79" name="Freeform 78"/>
           <p:cNvSpPr/>
           <p:nvPr/>
         </p:nvSpPr>
@@ -9556,7 +9904,7 @@
       </p:sp>
       <p:cxnSp>
         <p:nvCxnSpPr>
-          <p:cNvPr id="71" name="Connector 70"/>
+          <p:cNvPr id="80" name="Connector 79"/>
           <p:cNvCxnSpPr/>
           <p:nvPr/>
         </p:nvCxnSpPr>
@@ -9592,7 +9940,7 @@
       </p:cxnSp>
       <p:sp>
         <p:nvSpPr>
-          <p:cNvPr id="72" name="Freeform 71"/>
+          <p:cNvPr id="81" name="Freeform 80"/>
           <p:cNvSpPr/>
           <p:nvPr/>
         </p:nvSpPr>
@@ -9708,7 +10056,7 @@
       </p:sp>
       <p:sp>
         <p:nvSpPr>
-          <p:cNvPr id="73" name="Freeform 72"/>
+          <p:cNvPr id="82" name="Freeform 81"/>
           <p:cNvSpPr/>
           <p:nvPr/>
         </p:nvSpPr>
@@ -10126,7 +10474,7 @@
       </p:sp>
       <p:cxnSp>
         <p:nvCxnSpPr>
-          <p:cNvPr id="74" name="Connector 73"/>
+          <p:cNvPr id="83" name="Connector 82"/>
           <p:cNvCxnSpPr/>
           <p:nvPr/>
         </p:nvCxnSpPr>
@@ -10162,7 +10510,7 @@
       </p:cxnSp>
       <p:sp>
         <p:nvSpPr>
-          <p:cNvPr id="75" name="Freeform 74"/>
+          <p:cNvPr id="84" name="Freeform 83"/>
           <p:cNvSpPr/>
           <p:nvPr/>
         </p:nvSpPr>
